--- a/Research/Twin Study/Presentation/CHARM Twin Study 03272026.pptx
+++ b/Research/Twin Study/Presentation/CHARM Twin Study 03272026.pptx
@@ -110,7 +110,33 @@
       </a:defRPr>
     </a:lvl9pPr>
   </p:defaultTextStyle>
+  <p:extLst>
+    <p:ext uri="{EFAFB233-063F-42B5-8137-9DF3F51BA10A}">
+      <p15:sldGuideLst xmlns:p15="http://schemas.microsoft.com/office/powerpoint/2012/main"/>
+    </p:ext>
+  </p:extLst>
 </p:presentation>
+</file>
+
+<file path=ppt/changesInfos/changesInfo1.xml><?xml version="1.0" encoding="utf-8"?>
+<pc:chgInfo xmlns:a="http://schemas.openxmlformats.org/drawingml/2006/main" xmlns:r="http://schemas.openxmlformats.org/officeDocument/2006/relationships" xmlns:ac="http://schemas.microsoft.com/office/drawing/2013/main/command" xmlns:pc="http://schemas.microsoft.com/office/powerpoint/2013/main/command">
+  <pc:docChgLst>
+    <pc:chgData name="Tian, Jiahe" userId="9b248cb4-e481-44ff-b1b0-af8a80db8948" providerId="ADAL" clId="{165694EF-4DAD-5B80-B123-CA025C5C68B2}"/>
+    <pc:docChg chg="modSld">
+      <pc:chgData name="Tian, Jiahe" userId="9b248cb4-e481-44ff-b1b0-af8a80db8948" providerId="ADAL" clId="{165694EF-4DAD-5B80-B123-CA025C5C68B2}" dt="2026-05-15T13:21:23.732" v="31" actId="20577"/>
+      <pc:docMkLst>
+        <pc:docMk/>
+      </pc:docMkLst>
+      <pc:sldChg chg="modNotesTx">
+        <pc:chgData name="Tian, Jiahe" userId="9b248cb4-e481-44ff-b1b0-af8a80db8948" providerId="ADAL" clId="{165694EF-4DAD-5B80-B123-CA025C5C68B2}" dt="2026-05-15T13:21:23.732" v="31" actId="20577"/>
+        <pc:sldMkLst>
+          <pc:docMk/>
+          <pc:sldMk cId="2479594717" sldId="256"/>
+        </pc:sldMkLst>
+      </pc:sldChg>
+    </pc:docChg>
+  </pc:docChgLst>
+</pc:chgInfo>
 </file>
 
 <file path=ppt/notesMasters/notesMaster1.xml><?xml version="1.0" encoding="utf-8"?>
@@ -195,7 +221,7 @@
           <a:p>
             <a:fld id="{C455DC89-558B-4689-ACFD-521632BEFA95}" type="datetimeFigureOut">
               <a:rPr lang="en-US" smtClean="0"/>
-              <a:t>3/27/2026</a:t>
+              <a:t>5/15/26</a:t>
             </a:fld>
             <a:endParaRPr lang="en-US"/>
           </a:p>
@@ -510,6 +536,18 @@
               <a:rPr lang="en-US" dirty="0"/>
               <a:t>Check if triplets exist</a:t>
             </a:r>
+            <a:br>
+              <a:rPr lang="en-US" dirty="0"/>
+            </a:br>
+            <a:r>
+              <a:rPr lang="en-US" dirty="0"/>
+              <a:t>Check the number </a:t>
+            </a:r>
+            <a:r>
+              <a:rPr lang="en-US"/>
+              <a:t>of twin sets</a:t>
+            </a:r>
+            <a:endParaRPr lang="en-US" dirty="0"/>
           </a:p>
         </p:txBody>
       </p:sp>
@@ -696,7 +734,7 @@
           <a:p>
             <a:fld id="{4B01F7BA-493B-4BE1-953A-D37A72A3B2E4}" type="datetimeFigureOut">
               <a:rPr lang="en-US" smtClean="0"/>
-              <a:t>3/26/2026</a:t>
+              <a:t>5/15/26</a:t>
             </a:fld>
             <a:endParaRPr lang="en-US"/>
           </a:p>
@@ -894,7 +932,7 @@
           <a:p>
             <a:fld id="{4B01F7BA-493B-4BE1-953A-D37A72A3B2E4}" type="datetimeFigureOut">
               <a:rPr lang="en-US" smtClean="0"/>
-              <a:t>3/26/2026</a:t>
+              <a:t>5/15/26</a:t>
             </a:fld>
             <a:endParaRPr lang="en-US"/>
           </a:p>
@@ -1102,7 +1140,7 @@
           <a:p>
             <a:fld id="{4B01F7BA-493B-4BE1-953A-D37A72A3B2E4}" type="datetimeFigureOut">
               <a:rPr lang="en-US" smtClean="0"/>
-              <a:t>3/26/2026</a:t>
+              <a:t>5/15/26</a:t>
             </a:fld>
             <a:endParaRPr lang="en-US"/>
           </a:p>
@@ -1300,7 +1338,7 @@
           <a:p>
             <a:fld id="{4B01F7BA-493B-4BE1-953A-D37A72A3B2E4}" type="datetimeFigureOut">
               <a:rPr lang="en-US" smtClean="0"/>
-              <a:t>3/26/2026</a:t>
+              <a:t>5/15/26</a:t>
             </a:fld>
             <a:endParaRPr lang="en-US"/>
           </a:p>
@@ -1575,7 +1613,7 @@
           <a:p>
             <a:fld id="{4B01F7BA-493B-4BE1-953A-D37A72A3B2E4}" type="datetimeFigureOut">
               <a:rPr lang="en-US" smtClean="0"/>
-              <a:t>3/26/2026</a:t>
+              <a:t>5/15/26</a:t>
             </a:fld>
             <a:endParaRPr lang="en-US"/>
           </a:p>
@@ -1840,7 +1878,7 @@
           <a:p>
             <a:fld id="{4B01F7BA-493B-4BE1-953A-D37A72A3B2E4}" type="datetimeFigureOut">
               <a:rPr lang="en-US" smtClean="0"/>
-              <a:t>3/26/2026</a:t>
+              <a:t>5/15/26</a:t>
             </a:fld>
             <a:endParaRPr lang="en-US"/>
           </a:p>
@@ -2252,7 +2290,7 @@
           <a:p>
             <a:fld id="{4B01F7BA-493B-4BE1-953A-D37A72A3B2E4}" type="datetimeFigureOut">
               <a:rPr lang="en-US" smtClean="0"/>
-              <a:t>3/26/2026</a:t>
+              <a:t>5/15/26</a:t>
             </a:fld>
             <a:endParaRPr lang="en-US"/>
           </a:p>
@@ -2393,7 +2431,7 @@
           <a:p>
             <a:fld id="{4B01F7BA-493B-4BE1-953A-D37A72A3B2E4}" type="datetimeFigureOut">
               <a:rPr lang="en-US" smtClean="0"/>
-              <a:t>3/26/2026</a:t>
+              <a:t>5/15/26</a:t>
             </a:fld>
             <a:endParaRPr lang="en-US"/>
           </a:p>
@@ -2506,7 +2544,7 @@
           <a:p>
             <a:fld id="{4B01F7BA-493B-4BE1-953A-D37A72A3B2E4}" type="datetimeFigureOut">
               <a:rPr lang="en-US" smtClean="0"/>
-              <a:t>3/26/2026</a:t>
+              <a:t>5/15/26</a:t>
             </a:fld>
             <a:endParaRPr lang="en-US"/>
           </a:p>
@@ -2817,7 +2855,7 @@
           <a:p>
             <a:fld id="{4B01F7BA-493B-4BE1-953A-D37A72A3B2E4}" type="datetimeFigureOut">
               <a:rPr lang="en-US" smtClean="0"/>
-              <a:t>3/26/2026</a:t>
+              <a:t>5/15/26</a:t>
             </a:fld>
             <a:endParaRPr lang="en-US"/>
           </a:p>
@@ -3105,7 +3143,7 @@
           <a:p>
             <a:fld id="{4B01F7BA-493B-4BE1-953A-D37A72A3B2E4}" type="datetimeFigureOut">
               <a:rPr lang="en-US" smtClean="0"/>
-              <a:t>3/26/2026</a:t>
+              <a:t>5/15/26</a:t>
             </a:fld>
             <a:endParaRPr lang="en-US"/>
           </a:p>
@@ -3346,7 +3384,7 @@
           <a:p>
             <a:fld id="{4B01F7BA-493B-4BE1-953A-D37A72A3B2E4}" type="datetimeFigureOut">
               <a:rPr lang="en-US" smtClean="0"/>
-              <a:t>3/26/2026</a:t>
+              <a:t>5/15/26</a:t>
             </a:fld>
             <a:endParaRPr lang="en-US"/>
           </a:p>
@@ -5065,4 +5103,10 @@
     </a:ext>
   </a:extLst>
 </a:theme>
+</file>
+
+<file path=docMetadata/LabelInfo.xml><?xml version="1.0" encoding="utf-8"?>
+<clbl:labelList xmlns:clbl="http://schemas.microsoft.com/office/2020/mipLabelMetadata">
+  <clbl:label id="{22177130-642f-41d9-9211-74237ad5687d}" enabled="0" method="" siteId="{22177130-642f-41d9-9211-74237ad5687d}" removed="1"/>
+</clbl:labelList>
 </file>